--- a/activities/lab-05-enhance-powerpoint-with-charts/Lumina-Living-Leadership-Deck-Draft.pptx
+++ b/activities/lab-05-enhance-powerpoint-with-charts/Lumina-Living-Leadership-Deck-Draft.pptx
@@ -130,105 +130,60 @@
               <c:strCache>
                 <c:ptCount val="1"/>
                 <c:pt idx="0">
-                  <c:v>Actual</c:v>
+                  <c:v>Revenue SGD</c:v>
                 </c:pt>
               </c:strCache>
             </c:strRef>
           </c:tx>
           <c:cat>
             <c:strRef>
-              <c:f>Sheet1!$A$2:$A$5</c:f>
+              <c:f>Sheet1!$A$2:$A$7</c:f>
               <c:strCache>
-                <c:ptCount val="4"/>
+                <c:ptCount val="6"/>
                 <c:pt idx="0">
-                  <c:v>Jul</c:v>
+                  <c:v>Jan</c:v>
                 </c:pt>
                 <c:pt idx="1">
-                  <c:v>Aug</c:v>
+                  <c:v>Feb</c:v>
                 </c:pt>
                 <c:pt idx="2">
-                  <c:v>Sep</c:v>
+                  <c:v>Mar</c:v>
                 </c:pt>
                 <c:pt idx="3">
-                  <c:v>Oct</c:v>
+                  <c:v>Apr</c:v>
+                </c:pt>
+                <c:pt idx="4">
+                  <c:v>May</c:v>
+                </c:pt>
+                <c:pt idx="5">
+                  <c:v>Jun</c:v>
                 </c:pt>
               </c:strCache>
             </c:strRef>
           </c:cat>
           <c:val>
             <c:numRef>
-              <c:f>Sheet1!$B$2:$B$5</c:f>
+              <c:f>Sheet1!$B$2:$B$7</c:f>
               <c:numCache>
                 <c:formatCode>General</c:formatCode>
-                <c:ptCount val="4"/>
+                <c:ptCount val="6"/>
                 <c:pt idx="0">
-                  <c:v>74</c:v>
+                  <c:v>90150</c:v>
                 </c:pt>
                 <c:pt idx="1">
-                  <c:v>83</c:v>
+                  <c:v>145565</c:v>
                 </c:pt>
                 <c:pt idx="2">
-                  <c:v>90</c:v>
+                  <c:v>130880</c:v>
                 </c:pt>
                 <c:pt idx="3">
-                  <c:v>98</c:v>
+                  <c:v>189070</c:v>
                 </c:pt>
-              </c:numCache>
-            </c:numRef>
-          </c:val>
-          <c:smooth val="0"/>
-        </c:ser>
-        <c:ser>
-          <c:idx val="1"/>
-          <c:order val="1"/>
-          <c:tx>
-            <c:strRef>
-              <c:f>Sheet1!$C$1</c:f>
-              <c:strCache>
-                <c:ptCount val="1"/>
-                <c:pt idx="0">
-                  <c:v>Target</c:v>
+                <c:pt idx="4">
+                  <c:v>159920</c:v>
                 </c:pt>
-              </c:strCache>
-            </c:strRef>
-          </c:tx>
-          <c:cat>
-            <c:strRef>
-              <c:f>Sheet1!$A$2:$A$5</c:f>
-              <c:strCache>
-                <c:ptCount val="4"/>
-                <c:pt idx="0">
-                  <c:v>Jul</c:v>
-                </c:pt>
-                <c:pt idx="1">
-                  <c:v>Aug</c:v>
-                </c:pt>
-                <c:pt idx="2">
-                  <c:v>Sep</c:v>
-                </c:pt>
-                <c:pt idx="3">
-                  <c:v>Oct</c:v>
-                </c:pt>
-              </c:strCache>
-            </c:strRef>
-          </c:cat>
-          <c:val>
-            <c:numRef>
-              <c:f>Sheet1!$C$2:$C$5</c:f>
-              <c:numCache>
-                <c:formatCode>General</c:formatCode>
-                <c:ptCount val="4"/>
-                <c:pt idx="0">
-                  <c:v>78</c:v>
-                </c:pt>
-                <c:pt idx="1">
-                  <c:v>84</c:v>
-                </c:pt>
-                <c:pt idx="2">
-                  <c:v>90</c:v>
-                </c:pt>
-                <c:pt idx="3">
-                  <c:v>94</c:v>
+                <c:pt idx="5">
+                  <c:v>217705</c:v>
                 </c:pt>
               </c:numCache>
             </c:numRef>
@@ -250,6 +205,15 @@
         <c:majorTickMark val="out"/>
         <c:minorTickMark val="none"/>
         <c:tickLblPos val="nextTo"/>
+        <c:txPr>
+          <a:bodyPr/>
+          <a:lstStyle/>
+          <a:p>
+            <a:pPr>
+              <a:defRPr sz="1200"/>
+            </a:pPr>
+          </a:p>
+        </c:txPr>
         <c:crossAx val="2140495176"/>
         <c:crosses val="autoZero"/>
         <c:auto val="1"/>
@@ -266,6 +230,15 @@
         <c:majorTickMark val="out"/>
         <c:minorTickMark val="none"/>
         <c:tickLblPos val="nextTo"/>
+        <c:txPr>
+          <a:bodyPr/>
+          <a:lstStyle/>
+          <a:p>
+            <a:pPr>
+              <a:defRPr sz="1200"/>
+            </a:pPr>
+          </a:p>
+        </c:txPr>
         <c:crossAx val="2118791784"/>
         <c:crosses val="autoZero"/>
       </c:valAx>
@@ -313,7 +286,7 @@
               <c:strCache>
                 <c:ptCount val="1"/>
                 <c:pt idx="0">
-                  <c:v>Actual</c:v>
+                  <c:v>Margin SGD</c:v>
                 </c:pt>
               </c:strCache>
             </c:strRef>
@@ -324,16 +297,16 @@
               <c:strCache>
                 <c:ptCount val="4"/>
                 <c:pt idx="0">
-                  <c:v>Jul</c:v>
+                  <c:v>Web</c:v>
                 </c:pt>
                 <c:pt idx="1">
-                  <c:v>Aug</c:v>
+                  <c:v>Partner</c:v>
                 </c:pt>
                 <c:pt idx="2">
-                  <c:v>Sep</c:v>
+                  <c:v>Retail</c:v>
                 </c:pt>
                 <c:pt idx="3">
-                  <c:v>Oct</c:v>
+                  <c:v>Events</c:v>
                 </c:pt>
               </c:strCache>
             </c:strRef>
@@ -345,72 +318,16 @@
                 <c:formatCode>General</c:formatCode>
                 <c:ptCount val="4"/>
                 <c:pt idx="0">
-                  <c:v>75</c:v>
+                  <c:v>84544.39</c:v>
                 </c:pt>
                 <c:pt idx="1">
-                  <c:v>84</c:v>
+                  <c:v>94989.66</c:v>
                 </c:pt>
                 <c:pt idx="2">
-                  <c:v>91</c:v>
+                  <c:v>111411.32</c:v>
                 </c:pt>
                 <c:pt idx="3">
-                  <c:v>99</c:v>
-                </c:pt>
-              </c:numCache>
-            </c:numRef>
-          </c:val>
-        </c:ser>
-        <c:ser>
-          <c:idx val="1"/>
-          <c:order val="1"/>
-          <c:tx>
-            <c:strRef>
-              <c:f>Sheet1!$C$1</c:f>
-              <c:strCache>
-                <c:ptCount val="1"/>
-                <c:pt idx="0">
-                  <c:v>Target</c:v>
-                </c:pt>
-              </c:strCache>
-            </c:strRef>
-          </c:tx>
-          <c:cat>
-            <c:strRef>
-              <c:f>Sheet1!$A$2:$A$5</c:f>
-              <c:strCache>
-                <c:ptCount val="4"/>
-                <c:pt idx="0">
-                  <c:v>Jul</c:v>
-                </c:pt>
-                <c:pt idx="1">
-                  <c:v>Aug</c:v>
-                </c:pt>
-                <c:pt idx="2">
-                  <c:v>Sep</c:v>
-                </c:pt>
-                <c:pt idx="3">
-                  <c:v>Oct</c:v>
-                </c:pt>
-              </c:strCache>
-            </c:strRef>
-          </c:cat>
-          <c:val>
-            <c:numRef>
-              <c:f>Sheet1!$C$2:$C$5</c:f>
-              <c:numCache>
-                <c:formatCode>General</c:formatCode>
-                <c:ptCount val="4"/>
-                <c:pt idx="0">
-                  <c:v>78</c:v>
-                </c:pt>
-                <c:pt idx="1">
-                  <c:v>84</c:v>
-                </c:pt>
-                <c:pt idx="2">
-                  <c:v>90</c:v>
-                </c:pt>
-                <c:pt idx="3">
-                  <c:v>94</c:v>
+                  <c:v>121247.22</c:v>
                 </c:pt>
               </c:numCache>
             </c:numRef>
@@ -429,6 +346,15 @@
         <c:majorTickMark val="out"/>
         <c:minorTickMark val="none"/>
         <c:tickLblPos val="nextTo"/>
+        <c:txPr>
+          <a:bodyPr/>
+          <a:lstStyle/>
+          <a:p>
+            <a:pPr>
+              <a:defRPr sz="1200"/>
+            </a:pPr>
+          </a:p>
+        </c:txPr>
         <c:crossAx val="-2113994440"/>
         <c:crosses val="autoZero"/>
         <c:auto val="1"/>
@@ -445,11 +371,19 @@
         <c:majorTickMark val="out"/>
         <c:minorTickMark val="none"/>
         <c:tickLblPos val="nextTo"/>
+        <c:txPr>
+          <a:bodyPr/>
+          <a:lstStyle/>
+          <a:p>
+            <a:pPr>
+              <a:defRPr sz="1200"/>
+            </a:pPr>
+          </a:p>
+        </c:txPr>
         <c:crossAx val="-2068027336"/>
         <c:crosses val="autoZero"/>
       </c:valAx>
     </c:plotArea>
-    <c:legend/>
     <c:dispBlanksAs val="gap"/>
   </c:chart>
   <c:txPr>
@@ -486,7 +420,7 @@
               <c:strCache>
                 <c:ptCount val="1"/>
                 <c:pt idx="0">
-                  <c:v>Actual</c:v>
+                  <c:v>Completion fraction</c:v>
                 </c:pt>
               </c:strCache>
             </c:strRef>
@@ -497,16 +431,16 @@
               <c:strCache>
                 <c:ptCount val="4"/>
                 <c:pt idx="0">
-                  <c:v>Jul</c:v>
+                  <c:v>HR</c:v>
                 </c:pt>
                 <c:pt idx="1">
-                  <c:v>Aug</c:v>
+                  <c:v>Marketing</c:v>
                 </c:pt>
                 <c:pt idx="2">
-                  <c:v>Sep</c:v>
+                  <c:v>Finance</c:v>
                 </c:pt>
                 <c:pt idx="3">
-                  <c:v>Oct</c:v>
+                  <c:v>Operations</c:v>
                 </c:pt>
               </c:strCache>
             </c:strRef>
@@ -518,72 +452,16 @@
                 <c:formatCode>General</c:formatCode>
                 <c:ptCount val="4"/>
                 <c:pt idx="0">
-                  <c:v>76</c:v>
+                  <c:v>0.8333333333333334</c:v>
                 </c:pt>
                 <c:pt idx="1">
-                  <c:v>85</c:v>
+                  <c:v>0.875</c:v>
                 </c:pt>
                 <c:pt idx="2">
-                  <c:v>92</c:v>
+                  <c:v>1</c:v>
                 </c:pt>
                 <c:pt idx="3">
-                  <c:v>100</c:v>
-                </c:pt>
-              </c:numCache>
-            </c:numRef>
-          </c:val>
-        </c:ser>
-        <c:ser>
-          <c:idx val="1"/>
-          <c:order val="1"/>
-          <c:tx>
-            <c:strRef>
-              <c:f>Sheet1!$C$1</c:f>
-              <c:strCache>
-                <c:ptCount val="1"/>
-                <c:pt idx="0">
-                  <c:v>Target</c:v>
-                </c:pt>
-              </c:strCache>
-            </c:strRef>
-          </c:tx>
-          <c:cat>
-            <c:strRef>
-              <c:f>Sheet1!$A$2:$A$5</c:f>
-              <c:strCache>
-                <c:ptCount val="4"/>
-                <c:pt idx="0">
-                  <c:v>Jul</c:v>
-                </c:pt>
-                <c:pt idx="1">
-                  <c:v>Aug</c:v>
-                </c:pt>
-                <c:pt idx="2">
-                  <c:v>Sep</c:v>
-                </c:pt>
-                <c:pt idx="3">
-                  <c:v>Oct</c:v>
-                </c:pt>
-              </c:strCache>
-            </c:strRef>
-          </c:cat>
-          <c:val>
-            <c:numRef>
-              <c:f>Sheet1!$C$2:$C$5</c:f>
-              <c:numCache>
-                <c:formatCode>General</c:formatCode>
-                <c:ptCount val="4"/>
-                <c:pt idx="0">
-                  <c:v>78</c:v>
-                </c:pt>
-                <c:pt idx="1">
-                  <c:v>84</c:v>
-                </c:pt>
-                <c:pt idx="2">
-                  <c:v>90</c:v>
-                </c:pt>
-                <c:pt idx="3">
-                  <c:v>94</c:v>
+                  <c:v>0.75</c:v>
                 </c:pt>
               </c:numCache>
             </c:numRef>
@@ -602,6 +480,15 @@
         <c:majorTickMark val="out"/>
         <c:minorTickMark val="none"/>
         <c:tickLblPos val="nextTo"/>
+        <c:txPr>
+          <a:bodyPr/>
+          <a:lstStyle/>
+          <a:p>
+            <a:pPr>
+              <a:defRPr sz="1200"/>
+            </a:pPr>
+          </a:p>
+        </c:txPr>
         <c:crossAx val="-2113994440"/>
         <c:crosses val="autoZero"/>
         <c:auto val="1"/>
@@ -618,11 +505,19 @@
         <c:majorTickMark val="out"/>
         <c:minorTickMark val="none"/>
         <c:tickLblPos val="nextTo"/>
+        <c:txPr>
+          <a:bodyPr/>
+          <a:lstStyle/>
+          <a:p>
+            <a:pPr>
+              <a:defRPr sz="1200"/>
+            </a:pPr>
+          </a:p>
+        </c:txPr>
         <c:crossAx val="-2068027336"/>
         <c:crosses val="autoZero"/>
       </c:valAx>
     </c:plotArea>
-    <c:legend/>
     <c:dispBlanksAs val="gap"/>
   </c:chart>
   <c:txPr>
@@ -3615,14 +3510,6 @@
 <file path=ppt/slides/slide1.xml><?xml version="1.0" encoding="utf-8"?>
 <p:sld xmlns:a="http://schemas.openxmlformats.org/drawingml/2006/main" xmlns:p="http://schemas.openxmlformats.org/presentationml/2006/main" xmlns:r="http://schemas.openxmlformats.org/officeDocument/2006/relationships">
   <p:cSld>
-    <p:bg>
-      <p:bgPr>
-        <a:solidFill>
-          <a:srgbClr val="FFFFFF"/>
-        </a:solidFill>
-        <a:effectLst/>
-      </p:bgPr>
-    </p:bg>
     <p:spTree>
       <p:nvGrpSpPr>
         <p:cNvPr id="1" name=""/>
@@ -3638,8 +3525,8 @@
         </p:nvSpPr>
         <p:spPr>
           <a:xfrm>
-            <a:off x="731520" y="502920"/>
-            <a:ext cx="10698480" cy="731520"/>
+            <a:off x="594360" y="365760"/>
+            <a:ext cx="10972800" cy="914400"/>
           </a:xfrm>
           <a:prstGeom prst="rect">
             <a:avLst/>
@@ -3653,15 +3540,10 @@
           <a:lstStyle/>
           <a:p>
             <a:pPr>
-              <a:defRPr sz="3000" b="1">
-                <a:solidFill>
-                  <a:srgbClr val="161B26"/>
-                </a:solidFill>
-                <a:latin typeface="Arial"/>
-              </a:defRPr>
+              <a:defRPr sz="2900" b="1"/>
             </a:pPr>
             <a:r>
-              <a:t>Sustainable Workspace Campaign</a:t>
+              <a:t>Launch decision depends on readiness</a:t>
             </a:r>
           </a:p>
         </p:txBody>
@@ -3674,8 +3556,8 @@
         </p:nvSpPr>
         <p:spPr>
           <a:xfrm>
-            <a:off x="822960" y="1600200"/>
-            <a:ext cx="3931920" cy="4206240"/>
+            <a:off x="640080" y="1554480"/>
+            <a:ext cx="10607040" cy="4114800"/>
           </a:xfrm>
           <a:prstGeom prst="rect">
             <a:avLst/>
@@ -3689,15 +3571,35 @@
           <a:lstStyle/>
           <a:p>
             <a:pPr>
-              <a:defRPr sz="1800">
-                <a:solidFill>
-                  <a:srgbClr val="5B6372"/>
-                </a:solidFill>
-                <a:latin typeface="Arial"/>
-              </a:defRPr>
+              <a:spcAft>
+                <a:spcPts val="1500"/>
+              </a:spcAft>
+              <a:defRPr sz="1800"/>
             </a:pPr>
             <a:r>
-              <a:t>Context and source</a:t>
+              <a:t>Planned launch: 1 October 2026</a:t>
+            </a:r>
+          </a:p>
+          <a:p>
+            <a:pPr>
+              <a:spcAft>
+                <a:spcPts val="1500"/>
+              </a:spcAft>
+              <a:defRPr sz="1800"/>
+            </a:pPr>
+            <a:r>
+              <a:t>Budget:SGD 18,000; target: 120 qualified enquiries</a:t>
+            </a:r>
+          </a:p>
+          <a:p>
+            <a:pPr>
+              <a:spcAft>
+                <a:spcPts val="1500"/>
+              </a:spcAft>
+              <a:defRPr sz="1800"/>
+            </a:pPr>
+            <a:r>
+              <a:t>Review copy, financial evidence, HR training and Operations readiness before approval.</a:t>
             </a:r>
           </a:p>
         </p:txBody>
@@ -3710,8 +3612,8 @@
         </p:nvSpPr>
         <p:spPr>
           <a:xfrm>
-            <a:off x="731520" y="6419088"/>
-            <a:ext cx="10698480" cy="228600"/>
+            <a:off x="640080" y="6126480"/>
+            <a:ext cx="10972800" cy="457200"/>
           </a:xfrm>
           <a:prstGeom prst="rect">
             <a:avLst/>
@@ -3724,16 +3626,11 @@
           </a:bodyPr>
           <a:lstStyle/>
           <a:p>
-            <a:pPr algn="ctr">
-              <a:defRPr sz="800">
-                <a:solidFill>
-                  <a:srgbClr val="5B6372"/>
-                </a:solidFill>
-                <a:latin typeface="Arial"/>
-              </a:defRPr>
+            <a:pPr>
+              <a:defRPr sz="1000"/>
             </a:pPr>
             <a:r>
-              <a:t>Lumina Living · TGS-2024043856 · © 2026 Tertiary Infotech Academy Pte Ltd</a:t>
+              <a:t>Lumina Living | SW-2026 | Synthetic data | DRAFT FOR REVIEW | Source: Lumina-Business-Data.xlsx</a:t>
             </a:r>
           </a:p>
         </p:txBody>
@@ -3749,14 +3646,6 @@
 <file path=ppt/slides/slide2.xml><?xml version="1.0" encoding="utf-8"?>
 <p:sld xmlns:a="http://schemas.openxmlformats.org/drawingml/2006/main" xmlns:p="http://schemas.openxmlformats.org/presentationml/2006/main" xmlns:r="http://schemas.openxmlformats.org/officeDocument/2006/relationships">
   <p:cSld>
-    <p:bg>
-      <p:bgPr>
-        <a:solidFill>
-          <a:srgbClr val="FFFFFF"/>
-        </a:solidFill>
-        <a:effectLst/>
-      </p:bgPr>
-    </p:bg>
     <p:spTree>
       <p:nvGrpSpPr>
         <p:cNvPr id="1" name=""/>
@@ -3772,8 +3661,8 @@
         </p:nvSpPr>
         <p:spPr>
           <a:xfrm>
-            <a:off x="731520" y="502920"/>
-            <a:ext cx="10698480" cy="731520"/>
+            <a:off x="594360" y="365760"/>
+            <a:ext cx="10972800" cy="914400"/>
           </a:xfrm>
           <a:prstGeom prst="rect">
             <a:avLst/>
@@ -3787,15 +3676,10 @@
           <a:lstStyle/>
           <a:p>
             <a:pPr>
-              <a:defRPr sz="3000" b="1">
-                <a:solidFill>
-                  <a:srgbClr val="161B26"/>
-                </a:solidFill>
-                <a:latin typeface="Arial"/>
-              </a:defRPr>
+              <a:defRPr sz="2900" b="1"/>
             </a:pPr>
             <a:r>
-              <a:t>The customer need</a:t>
+              <a:t>Historical revenue provides the baseline</a:t>
             </a:r>
           </a:p>
         </p:txBody>
@@ -3808,8 +3692,8 @@
         </p:nvSpPr>
         <p:spPr>
           <a:xfrm>
-            <a:off x="822960" y="1600200"/>
-            <a:ext cx="3931920" cy="4206240"/>
+            <a:off x="640080" y="1554480"/>
+            <a:ext cx="3749039" cy="4114800"/>
           </a:xfrm>
           <a:prstGeom prst="rect">
             <a:avLst/>
@@ -3823,29 +3707,67 @@
           <a:lstStyle/>
           <a:p>
             <a:pPr>
-              <a:defRPr sz="1800">
-                <a:solidFill>
-                  <a:srgbClr val="5B6372"/>
-                </a:solidFill>
-                <a:latin typeface="Arial"/>
-              </a:defRPr>
+              <a:spcAft>
+                <a:spcPts val="1500"/>
+              </a:spcAft>
+              <a:defRPr sz="1800"/>
             </a:pPr>
             <a:r>
-              <a:t>Verified finding</a:t>
-            </a:r>
-          </a:p>
-        </p:txBody>
-      </p:sp>
-      <p:sp>
-        <p:nvSpPr>
-          <p:cNvPr id="4" name="TextBox 3"/>
+              <a:t>Jan–Jun revenue:SGD 933,290</a:t>
+            </a:r>
+          </a:p>
+          <a:p>
+            <a:pPr>
+              <a:spcAft>
+                <a:spcPts val="1500"/>
+              </a:spcAft>
+              <a:defRPr sz="1800"/>
+            </a:pPr>
+            <a:r>
+              <a:t>Use the historical pattern as context; it is not an October forecast.</a:t>
+            </a:r>
+          </a:p>
+          <a:p>
+            <a:pPr>
+              <a:spcAft>
+                <a:spcPts val="1500"/>
+              </a:spcAft>
+              <a:defRPr sz="1800"/>
+            </a:pPr>
+            <a:r>
+              <a:t>Source:Monthly!A2:B7</a:t>
+            </a:r>
+          </a:p>
+        </p:txBody>
+      </p:sp>
+      <p:graphicFrame>
+        <p:nvGraphicFramePr>
+          <p:cNvPr id="4" name="Chart 3"/>
+          <p:cNvGraphicFramePr>
+            <a:graphicFrameLocks noGrp="1"/>
+          </p:cNvGraphicFramePr>
+          <p:nvPr/>
+        </p:nvGraphicFramePr>
+        <p:xfrm>
+          <a:off x="4572000" y="1554480"/>
+          <a:ext cx="6858000" cy="4297680"/>
+        </p:xfrm>
+        <a:graphic>
+          <a:graphicData uri="http://schemas.openxmlformats.org/drawingml/2006/chart">
+            <c:chart xmlns:c="http://schemas.openxmlformats.org/drawingml/2006/chart" r:id="rId2"/>
+          </a:graphicData>
+        </a:graphic>
+      </p:graphicFrame>
+      <p:sp>
+        <p:nvSpPr>
+          <p:cNvPr id="5" name="TextBox 4"/>
           <p:cNvSpPr txBox="1"/>
           <p:nvPr/>
         </p:nvSpPr>
         <p:spPr>
           <a:xfrm>
-            <a:off x="731520" y="6419088"/>
-            <a:ext cx="10698480" cy="228600"/>
+            <a:off x="640080" y="6126480"/>
+            <a:ext cx="10972800" cy="457200"/>
           </a:xfrm>
           <a:prstGeom prst="rect">
             <a:avLst/>
@@ -3858,16 +3780,11 @@
           </a:bodyPr>
           <a:lstStyle/>
           <a:p>
-            <a:pPr algn="ctr">
-              <a:defRPr sz="800">
-                <a:solidFill>
-                  <a:srgbClr val="5B6372"/>
-                </a:solidFill>
-                <a:latin typeface="Arial"/>
-              </a:defRPr>
+            <a:pPr>
+              <a:defRPr sz="1000"/>
             </a:pPr>
             <a:r>
-              <a:t>Lumina Living · TGS-2024043856 · © 2026 Tertiary Infotech Academy Pte Ltd</a:t>
+              <a:t>Lumina Living | SW-2026 | Synthetic data | DRAFT FOR REVIEW | Source: Lumina-Business-Data.xlsx</a:t>
             </a:r>
           </a:p>
         </p:txBody>
@@ -3883,14 +3800,6 @@
 <file path=ppt/slides/slide3.xml><?xml version="1.0" encoding="utf-8"?>
 <p:sld xmlns:a="http://schemas.openxmlformats.org/drawingml/2006/main" xmlns:p="http://schemas.openxmlformats.org/presentationml/2006/main" xmlns:r="http://schemas.openxmlformats.org/officeDocument/2006/relationships">
   <p:cSld>
-    <p:bg>
-      <p:bgPr>
-        <a:solidFill>
-          <a:srgbClr val="FFFFFF"/>
-        </a:solidFill>
-        <a:effectLst/>
-      </p:bgPr>
-    </p:bg>
     <p:spTree>
       <p:nvGrpSpPr>
         <p:cNvPr id="1" name=""/>
@@ -3906,8 +3815,8 @@
         </p:nvSpPr>
         <p:spPr>
           <a:xfrm>
-            <a:off x="731520" y="502920"/>
-            <a:ext cx="10698480" cy="731520"/>
+            <a:off x="594360" y="365760"/>
+            <a:ext cx="10972800" cy="914400"/>
           </a:xfrm>
           <a:prstGeom prst="rect">
             <a:avLst/>
@@ -3921,15 +3830,10 @@
           <a:lstStyle/>
           <a:p>
             <a:pPr>
-              <a:defRPr sz="3000" b="1">
-                <a:solidFill>
-                  <a:srgbClr val="161B26"/>
-                </a:solidFill>
-                <a:latin typeface="Arial"/>
-              </a:defRPr>
+              <a:defRPr sz="2900" b="1"/>
             </a:pPr>
             <a:r>
-              <a:t>Evidence and opportunity</a:t>
+              <a:t>Events leads historical margin contribution</a:t>
             </a:r>
           </a:p>
         </p:txBody>
@@ -3942,8 +3846,8 @@
         </p:nvSpPr>
         <p:spPr>
           <a:xfrm>
-            <a:off x="822960" y="1600200"/>
-            <a:ext cx="3931920" cy="4206240"/>
+            <a:off x="640080" y="1554480"/>
+            <a:ext cx="3749039" cy="4114800"/>
           </a:xfrm>
           <a:prstGeom prst="rect">
             <a:avLst/>
@@ -3957,15 +3861,35 @@
           <a:lstStyle/>
           <a:p>
             <a:pPr>
-              <a:defRPr sz="1800">
-                <a:solidFill>
-                  <a:srgbClr val="5B6372"/>
-                </a:solidFill>
-                <a:latin typeface="Arial"/>
-              </a:defRPr>
+              <a:spcAft>
+                <a:spcPts val="1500"/>
+              </a:spcAft>
+              <a:defRPr sz="1800"/>
             </a:pPr>
             <a:r>
-              <a:t>Caveat and control</a:t>
+              <a:t>Total margin:SGD 412,193</a:t>
+            </a:r>
+          </a:p>
+          <a:p>
+            <a:pPr>
+              <a:spcAft>
+                <a:spcPts val="1500"/>
+              </a:spcAft>
+              <a:defRPr sz="1800"/>
+            </a:pPr>
+            <a:r>
+              <a:t>Margin is revenue minus the supplied cost, not net profit.</a:t>
+            </a:r>
+          </a:p>
+          <a:p>
+            <a:pPr>
+              <a:spcAft>
+                <a:spcPts val="1500"/>
+              </a:spcAft>
+              <a:defRPr sz="1800"/>
+            </a:pPr>
+            <a:r>
+              <a:t>Source:Channels!A2:D5</a:t>
             </a:r>
           </a:p>
         </p:txBody>
@@ -3979,8 +3903,8 @@
           <p:nvPr/>
         </p:nvGraphicFramePr>
         <p:xfrm>
-          <a:off x="5074920" y="1600200"/>
-          <a:ext cx="6080760" cy="4160520"/>
+          <a:off x="4572000" y="1554480"/>
+          <a:ext cx="6858000" cy="4297680"/>
         </p:xfrm>
         <a:graphic>
           <a:graphicData uri="http://schemas.openxmlformats.org/drawingml/2006/chart">
@@ -3996,8 +3920,8 @@
         </p:nvSpPr>
         <p:spPr>
           <a:xfrm>
-            <a:off x="731520" y="6419088"/>
-            <a:ext cx="10698480" cy="228600"/>
+            <a:off x="640080" y="6126480"/>
+            <a:ext cx="10972800" cy="457200"/>
           </a:xfrm>
           <a:prstGeom prst="rect">
             <a:avLst/>
@@ -4010,16 +3934,11 @@
           </a:bodyPr>
           <a:lstStyle/>
           <a:p>
-            <a:pPr algn="ctr">
-              <a:defRPr sz="800">
-                <a:solidFill>
-                  <a:srgbClr val="5B6372"/>
-                </a:solidFill>
-                <a:latin typeface="Arial"/>
-              </a:defRPr>
+            <a:pPr>
+              <a:defRPr sz="1000"/>
             </a:pPr>
             <a:r>
-              <a:t>Lumina Living · TGS-2024043856 · © 2026 Tertiary Infotech Academy Pte Ltd</a:t>
+              <a:t>Lumina Living | SW-2026 | Synthetic data | DRAFT FOR REVIEW | Source: Lumina-Business-Data.xlsx</a:t>
             </a:r>
           </a:p>
         </p:txBody>
@@ -4035,14 +3954,6 @@
 <file path=ppt/slides/slide4.xml><?xml version="1.0" encoding="utf-8"?>
 <p:sld xmlns:a="http://schemas.openxmlformats.org/drawingml/2006/main" xmlns:p="http://schemas.openxmlformats.org/presentationml/2006/main" xmlns:r="http://schemas.openxmlformats.org/officeDocument/2006/relationships">
   <p:cSld>
-    <p:bg>
-      <p:bgPr>
-        <a:solidFill>
-          <a:srgbClr val="FFFFFF"/>
-        </a:solidFill>
-        <a:effectLst/>
-      </p:bgPr>
-    </p:bg>
     <p:spTree>
       <p:nvGrpSpPr>
         <p:cNvPr id="1" name=""/>
@@ -4058,8 +3969,8 @@
         </p:nvSpPr>
         <p:spPr>
           <a:xfrm>
-            <a:off x="731520" y="502920"/>
-            <a:ext cx="10698480" cy="731520"/>
+            <a:off x="594360" y="365760"/>
+            <a:ext cx="10972800" cy="914400"/>
           </a:xfrm>
           <a:prstGeom prst="rect">
             <a:avLst/>
@@ -4073,15 +3984,10 @@
           <a:lstStyle/>
           <a:p>
             <a:pPr>
-              <a:defRPr sz="3000" b="1">
-                <a:solidFill>
-                  <a:srgbClr val="161B26"/>
-                </a:solidFill>
-                <a:latin typeface="Arial"/>
-              </a:defRPr>
+              <a:defRPr sz="2900" b="1"/>
             </a:pPr>
             <a:r>
-              <a:t>Campaign plan</a:t>
+              <a:t>Nine employees still need training</a:t>
             </a:r>
           </a:p>
         </p:txBody>
@@ -4094,8 +4000,8 @@
         </p:nvSpPr>
         <p:spPr>
           <a:xfrm>
-            <a:off x="822960" y="1600200"/>
-            <a:ext cx="3931920" cy="4206240"/>
+            <a:off x="640080" y="1554480"/>
+            <a:ext cx="3749039" cy="4114800"/>
           </a:xfrm>
           <a:prstGeom prst="rect">
             <a:avLst/>
@@ -4109,15 +4015,46 @@
           <a:lstStyle/>
           <a:p>
             <a:pPr>
-              <a:defRPr sz="1800">
-                <a:solidFill>
-                  <a:srgbClr val="5B6372"/>
-                </a:solidFill>
-                <a:latin typeface="Arial"/>
-              </a:defRPr>
+              <a:spcAft>
+                <a:spcPts val="1500"/>
+              </a:spcAft>
+              <a:defRPr sz="1800"/>
             </a:pPr>
             <a:r>
-              <a:t>Decision or next action</a:t>
+              <a:t>47/56 trained: 83.9%</a:t>
+            </a:r>
+          </a:p>
+          <a:p>
+            <a:pPr>
+              <a:spcAft>
+                <a:spcPts val="1500"/>
+              </a:spcAft>
+              <a:defRPr sz="1800"/>
+            </a:pPr>
+            <a:r>
+              <a:t>Operations has five of the nine gaps.</a:t>
+            </a:r>
+          </a:p>
+          <a:p>
+            <a:pPr>
+              <a:spcAft>
+                <a:spcPts val="1500"/>
+              </a:spcAft>
+              <a:defRPr sz="1800"/>
+            </a:pPr>
+            <a:r>
+              <a:t>Aisha owns completion by 24 September.</a:t>
+            </a:r>
+          </a:p>
+          <a:p>
+            <a:pPr>
+              <a:spcAft>
+                <a:spcPts val="1500"/>
+              </a:spcAft>
+              <a:defRPr sz="1800"/>
+            </a:pPr>
+            <a:r>
+              <a:t>Source:HR_Readiness!A2:E6</a:t>
             </a:r>
           </a:p>
         </p:txBody>
@@ -4131,8 +4068,8 @@
           <p:nvPr/>
         </p:nvGraphicFramePr>
         <p:xfrm>
-          <a:off x="5074920" y="1600200"/>
-          <a:ext cx="6080760" cy="4160520"/>
+          <a:off x="4572000" y="1554480"/>
+          <a:ext cx="6858000" cy="4297680"/>
         </p:xfrm>
         <a:graphic>
           <a:graphicData uri="http://schemas.openxmlformats.org/drawingml/2006/chart">
@@ -4148,8 +4085,8 @@
         </p:nvSpPr>
         <p:spPr>
           <a:xfrm>
-            <a:off x="731520" y="6419088"/>
-            <a:ext cx="10698480" cy="228600"/>
+            <a:off x="640080" y="6126480"/>
+            <a:ext cx="10972800" cy="457200"/>
           </a:xfrm>
           <a:prstGeom prst="rect">
             <a:avLst/>
@@ -4162,16 +4099,11 @@
           </a:bodyPr>
           <a:lstStyle/>
           <a:p>
-            <a:pPr algn="ctr">
-              <a:defRPr sz="800">
-                <a:solidFill>
-                  <a:srgbClr val="5B6372"/>
-                </a:solidFill>
-                <a:latin typeface="Arial"/>
-              </a:defRPr>
+            <a:pPr>
+              <a:defRPr sz="1000"/>
             </a:pPr>
             <a:r>
-              <a:t>Lumina Living · TGS-2024043856 · © 2026 Tertiary Infotech Academy Pte Ltd</a:t>
+              <a:t>Lumina Living | SW-2026 | Synthetic data | DRAFT FOR REVIEW | Source: Lumina-Business-Data.xlsx</a:t>
             </a:r>
           </a:p>
         </p:txBody>
@@ -4187,14 +4119,6 @@
 <file path=ppt/slides/slide5.xml><?xml version="1.0" encoding="utf-8"?>
 <p:sld xmlns:a="http://schemas.openxmlformats.org/drawingml/2006/main" xmlns:p="http://schemas.openxmlformats.org/presentationml/2006/main" xmlns:r="http://schemas.openxmlformats.org/officeDocument/2006/relationships">
   <p:cSld>
-    <p:bg>
-      <p:bgPr>
-        <a:solidFill>
-          <a:srgbClr val="FFFFFF"/>
-        </a:solidFill>
-        <a:effectLst/>
-      </p:bgPr>
-    </p:bg>
     <p:spTree>
       <p:nvGrpSpPr>
         <p:cNvPr id="1" name=""/>
@@ -4210,8 +4134,8 @@
         </p:nvSpPr>
         <p:spPr>
           <a:xfrm>
-            <a:off x="731520" y="502920"/>
-            <a:ext cx="10698480" cy="731520"/>
+            <a:off x="594360" y="365760"/>
+            <a:ext cx="10972800" cy="914400"/>
           </a:xfrm>
           <a:prstGeom prst="rect">
             <a:avLst/>
@@ -4225,15 +4149,10 @@
           <a:lstStyle/>
           <a:p>
             <a:pPr>
-              <a:defRPr sz="3000" b="1">
-                <a:solidFill>
-                  <a:srgbClr val="161B26"/>
-                </a:solidFill>
-                <a:latin typeface="Arial"/>
-              </a:defRPr>
+              <a:defRPr sz="2900" b="1"/>
             </a:pPr>
             <a:r>
-              <a:t>Risk and controls</a:t>
+              <a:t>Claims and source limits shape the message</a:t>
             </a:r>
           </a:p>
         </p:txBody>
@@ -4246,8 +4165,8 @@
         </p:nvSpPr>
         <p:spPr>
           <a:xfrm>
-            <a:off x="822960" y="1600200"/>
-            <a:ext cx="3931920" cy="4206240"/>
+            <a:off x="640080" y="1554480"/>
+            <a:ext cx="10607040" cy="4114800"/>
           </a:xfrm>
           <a:prstGeom prst="rect">
             <a:avLst/>
@@ -4261,47 +4180,60 @@
           <a:lstStyle/>
           <a:p>
             <a:pPr>
-              <a:defRPr sz="1800">
-                <a:solidFill>
-                  <a:srgbClr val="5B6372"/>
-                </a:solidFill>
-                <a:latin typeface="Arial"/>
-              </a:defRPr>
+              <a:spcAft>
+                <a:spcPts val="1500"/>
+              </a:spcAft>
+              <a:defRPr sz="1800"/>
             </a:pPr>
             <a:r>
-              <a:t>Context and source</a:t>
-            </a:r>
-          </a:p>
-        </p:txBody>
-      </p:sp>
-      <p:graphicFrame>
-        <p:nvGraphicFramePr>
-          <p:cNvPr id="4" name="Chart 3"/>
-          <p:cNvGraphicFramePr>
-            <a:graphicFrameLocks noGrp="1"/>
-          </p:cNvGraphicFramePr>
-          <p:nvPr/>
-        </p:nvGraphicFramePr>
-        <p:xfrm>
-          <a:off x="5074920" y="1600200"/>
-          <a:ext cx="6080760" cy="4160520"/>
-        </p:xfrm>
-        <a:graphic>
-          <a:graphicData uri="http://schemas.openxmlformats.org/drawingml/2006/chart">
-            <c:chart xmlns:c="http://schemas.openxmlformats.org/drawingml/2006/chart" r:id="rId2"/>
-          </a:graphicData>
-        </a:graphic>
-      </p:graphicFrame>
-      <p:sp>
-        <p:nvSpPr>
-          <p:cNvPr id="5" name="TextBox 4"/>
+              <a:t>Use:workspace products designed for reuse and repair.</a:t>
+            </a:r>
+          </a:p>
+          <a:p>
+            <a:pPr>
+              <a:spcAft>
+                <a:spcPts val="1500"/>
+              </a:spcAft>
+              <a:defRPr sz="1800"/>
+            </a:pPr>
+            <a:r>
+              <a:t>Do not claim carbon neutrality or unsupported certification.</a:t>
+            </a:r>
+          </a:p>
+          <a:p>
+            <a:pPr>
+              <a:spcAft>
+                <a:spcPts val="1500"/>
+              </a:spcAft>
+              <a:defRPr sz="1800"/>
+            </a:pPr>
+            <a:r>
+              <a:t>The campaign budget and target are planned; keep them separate from historical performance.</a:t>
+            </a:r>
+          </a:p>
+          <a:p>
+            <a:pPr>
+              <a:spcAft>
+                <a:spcPts val="1500"/>
+              </a:spcAft>
+              <a:defRPr sz="1800"/>
+            </a:pPr>
+            <a:r>
+              <a:t>Source:CAM-2026-Q4; HR-01.</a:t>
+            </a:r>
+          </a:p>
+        </p:txBody>
+      </p:sp>
+      <p:sp>
+        <p:nvSpPr>
+          <p:cNvPr id="4" name="TextBox 3"/>
           <p:cNvSpPr txBox="1"/>
           <p:nvPr/>
         </p:nvSpPr>
         <p:spPr>
           <a:xfrm>
-            <a:off x="731520" y="6419088"/>
-            <a:ext cx="10698480" cy="228600"/>
+            <a:off x="640080" y="6126480"/>
+            <a:ext cx="10972800" cy="457200"/>
           </a:xfrm>
           <a:prstGeom prst="rect">
             <a:avLst/>
@@ -4314,16 +4246,11 @@
           </a:bodyPr>
           <a:lstStyle/>
           <a:p>
-            <a:pPr algn="ctr">
-              <a:defRPr sz="800">
-                <a:solidFill>
-                  <a:srgbClr val="5B6372"/>
-                </a:solidFill>
-                <a:latin typeface="Arial"/>
-              </a:defRPr>
+            <a:pPr>
+              <a:defRPr sz="1000"/>
             </a:pPr>
             <a:r>
-              <a:t>Lumina Living · TGS-2024043856 · © 2026 Tertiary Infotech Academy Pte Ltd</a:t>
+              <a:t>Lumina Living | SW-2026 | Synthetic data | DRAFT FOR REVIEW | Source: Lumina-Business-Data.xlsx</a:t>
             </a:r>
           </a:p>
         </p:txBody>
@@ -4339,14 +4266,6 @@
 <file path=ppt/slides/slide6.xml><?xml version="1.0" encoding="utf-8"?>
 <p:sld xmlns:a="http://schemas.openxmlformats.org/drawingml/2006/main" xmlns:p="http://schemas.openxmlformats.org/presentationml/2006/main" xmlns:r="http://schemas.openxmlformats.org/officeDocument/2006/relationships">
   <p:cSld>
-    <p:bg>
-      <p:bgPr>
-        <a:solidFill>
-          <a:srgbClr val="FFFFFF"/>
-        </a:solidFill>
-        <a:effectLst/>
-      </p:bgPr>
-    </p:bg>
     <p:spTree>
       <p:nvGrpSpPr>
         <p:cNvPr id="1" name=""/>
@@ -4362,8 +4281,8 @@
         </p:nvSpPr>
         <p:spPr>
           <a:xfrm>
-            <a:off x="731520" y="502920"/>
-            <a:ext cx="10698480" cy="731520"/>
+            <a:off x="594360" y="365760"/>
+            <a:ext cx="10972800" cy="914400"/>
           </a:xfrm>
           <a:prstGeom prst="rect">
             <a:avLst/>
@@ -4377,15 +4296,10 @@
           <a:lstStyle/>
           <a:p>
             <a:pPr>
-              <a:defRPr sz="3000" b="1">
-                <a:solidFill>
-                  <a:srgbClr val="161B26"/>
-                </a:solidFill>
-                <a:latin typeface="Arial"/>
-              </a:defRPr>
+              <a:defRPr sz="2900" b="1"/>
             </a:pPr>
             <a:r>
-              <a:t>Decision required</a:t>
+              <a:t>Keep four actions consistent across apps</a:t>
             </a:r>
           </a:p>
         </p:txBody>
@@ -4398,8 +4312,8 @@
         </p:nvSpPr>
         <p:spPr>
           <a:xfrm>
-            <a:off x="822960" y="1600200"/>
-            <a:ext cx="3931920" cy="4206240"/>
+            <a:off x="640080" y="1554480"/>
+            <a:ext cx="10607040" cy="4114800"/>
           </a:xfrm>
           <a:prstGeom prst="rect">
             <a:avLst/>
@@ -4413,15 +4327,57 @@
           <a:lstStyle/>
           <a:p>
             <a:pPr>
-              <a:defRPr sz="1800">
-                <a:solidFill>
-                  <a:srgbClr val="5B6372"/>
-                </a:solidFill>
-                <a:latin typeface="Arial"/>
-              </a:defRPr>
+              <a:spcAft>
+                <a:spcPts val="1500"/>
+              </a:spcAft>
+              <a:defRPr sz="1800"/>
             </a:pPr>
             <a:r>
-              <a:t>Verified finding</a:t>
+              <a:t>A01 HR — train remaining staff — 24 September</a:t>
+            </a:r>
+          </a:p>
+          <a:p>
+            <a:pPr>
+              <a:spcAft>
+                <a:spcPts val="1500"/>
+              </a:spcAft>
+              <a:defRPr sz="1800"/>
+            </a:pPr>
+            <a:r>
+              <a:t>A02 Marketing — review copy — 23 September</a:t>
+            </a:r>
+          </a:p>
+          <a:p>
+            <a:pPr>
+              <a:spcAft>
+                <a:spcPts val="1500"/>
+              </a:spcAft>
+              <a:defRPr sz="1800"/>
+            </a:pPr>
+            <a:r>
+              <a:t>A03 Finance — verify figures — 25 September</a:t>
+            </a:r>
+          </a:p>
+          <a:p>
+            <a:pPr>
+              <a:spcAft>
+                <a:spcPts val="1500"/>
+              </a:spcAft>
+              <a:defRPr sz="1800"/>
+            </a:pPr>
+            <a:r>
+              <a:t>A04 Operations — confirm service readiness — 25 September</a:t>
+            </a:r>
+          </a:p>
+          <a:p>
+            <a:pPr>
+              <a:spcAft>
+                <a:spcPts val="1500"/>
+              </a:spcAft>
+              <a:defRPr sz="1800"/>
+            </a:pPr>
+            <a:r>
+              <a:t>Record evidence in the Loop register. Human review precedes delivery.</a:t>
             </a:r>
           </a:p>
         </p:txBody>
@@ -4434,8 +4390,8 @@
         </p:nvSpPr>
         <p:spPr>
           <a:xfrm>
-            <a:off x="731520" y="6419088"/>
-            <a:ext cx="10698480" cy="228600"/>
+            <a:off x="640080" y="6126480"/>
+            <a:ext cx="10972800" cy="457200"/>
           </a:xfrm>
           <a:prstGeom prst="rect">
             <a:avLst/>
@@ -4448,16 +4404,11 @@
           </a:bodyPr>
           <a:lstStyle/>
           <a:p>
-            <a:pPr algn="ctr">
-              <a:defRPr sz="800">
-                <a:solidFill>
-                  <a:srgbClr val="5B6372"/>
-                </a:solidFill>
-                <a:latin typeface="Arial"/>
-              </a:defRPr>
+            <a:pPr>
+              <a:defRPr sz="1000"/>
             </a:pPr>
             <a:r>
-              <a:t>Lumina Living · TGS-2024043856 · © 2026 Tertiary Infotech Academy Pte Ltd</a:t>
+              <a:t>Lumina Living | SW-2026 | Synthetic data | DRAFT FOR REVIEW | Source: Lumina-Business-Data.xlsx</a:t>
             </a:r>
           </a:p>
         </p:txBody>
